--- a/public/fun/cards/teacher/teacher-24.pptx
+++ b/public/fun/cards/teacher/teacher-24.pptx
@@ -3085,7 +3085,7 @@
     <p:bg>
       <p:bgPr>
         <a:solidFill>
-          <a:srgbClr val="908118"/>
+          <a:srgbClr val="4CC3FF"/>
         </a:solidFill>
         <a:effectLst/>
       </p:bgPr>
@@ -3099,38 +3099,20 @@
       <p:grpSpPr/>
       <p:sp>
         <p:nvSpPr>
-          <p:cNvPr id="2" name="Freeform 1"/>
+          <p:cNvPr id="2" name="Oval 1"/>
           <p:cNvSpPr/>
           <p:nvPr/>
         </p:nvSpPr>
         <p:spPr>
           <a:xfrm>
-            <a:off x="1944000" y="540000"/>
-            <a:ext cx="1296000" cy="1260000"/>
-          </a:xfrm>
-          <a:custGeom>
+            <a:off x="2646000" y="234000"/>
+            <a:ext cx="36000" cy="36000"/>
+          </a:xfrm>
+          <a:prstGeom prst="ellipse">
             <a:avLst/>
-            <a:gdLst/>
-            <a:ahLst/>
-            <a:cxnLst/>
-            <a:rect l="l" t="t" r="r" b="b"/>
-            <a:pathLst>
-              <a:path w="1296000" h="1260000">
-                <a:moveTo>
-                  <a:pt x="1296000" y="1260000"/>
-                </a:moveTo>
-                <a:lnTo>
-                  <a:pt x="1296000" y="0"/>
-                </a:lnTo>
-                <a:lnTo>
-                  <a:pt x="0" y="1260000"/>
-                </a:lnTo>
-                <a:close/>
-              </a:path>
-            </a:pathLst>
-          </a:custGeom>
+          </a:prstGeom>
           <a:solidFill>
-            <a:srgbClr val="F8F2C9"/>
+            <a:srgbClr val="12151C"/>
           </a:solidFill>
           <a:ln>
             <a:noFill/>
@@ -3146,40 +3128,20 @@
       </p:sp>
       <p:sp>
         <p:nvSpPr>
-          <p:cNvPr id="3" name="Freeform 2"/>
+          <p:cNvPr id="3" name="Oval 2"/>
           <p:cNvSpPr/>
           <p:nvPr/>
         </p:nvSpPr>
         <p:spPr>
           <a:xfrm>
-            <a:off x="2520000" y="1080000"/>
-            <a:ext cx="720000" cy="720000"/>
-          </a:xfrm>
-          <a:custGeom>
+            <a:off x="2646000" y="334800"/>
+            <a:ext cx="36000" cy="36000"/>
+          </a:xfrm>
+          <a:prstGeom prst="ellipse">
             <a:avLst/>
-            <a:gdLst/>
-            <a:ahLst/>
-            <a:cxnLst/>
-            <a:rect l="l" t="t" r="r" b="b"/>
-            <a:pathLst>
-              <a:path w="720000" h="720000">
-                <a:moveTo>
-                  <a:pt x="720000" y="720000"/>
-                </a:moveTo>
-                <a:lnTo>
-                  <a:pt x="720000" y="0"/>
-                </a:lnTo>
-                <a:lnTo>
-                  <a:pt x="0" y="720000"/>
-                </a:lnTo>
-                <a:close/>
-              </a:path>
-            </a:pathLst>
-          </a:custGeom>
+          </a:prstGeom>
           <a:solidFill>
-            <a:srgbClr val="A2953D">
-              <a:alpha val="90000"/>
-            </a:srgbClr>
+            <a:srgbClr val="82D5FF"/>
           </a:solidFill>
           <a:ln>
             <a:noFill/>
@@ -3195,59 +3157,20 @@
       </p:sp>
       <p:sp>
         <p:nvSpPr>
-          <p:cNvPr id="4" name="Freeform 3"/>
+          <p:cNvPr id="4" name="Oval 3"/>
           <p:cNvSpPr/>
           <p:nvPr/>
         </p:nvSpPr>
         <p:spPr>
           <a:xfrm>
-            <a:off x="2835454" y="1353456"/>
-            <a:ext cx="233092" cy="221684"/>
-          </a:xfrm>
-          <a:custGeom>
+            <a:off x="2646000" y="435600"/>
+            <a:ext cx="36000" cy="36000"/>
+          </a:xfrm>
+          <a:prstGeom prst="ellipse">
             <a:avLst/>
-            <a:gdLst/>
-            <a:ahLst/>
-            <a:cxnLst/>
-            <a:rect l="l" t="t" r="r" b="b"/>
-            <a:pathLst>
-              <a:path w="233092" h="221684">
-                <a:moveTo>
-                  <a:pt x="116546" y="0"/>
-                </a:moveTo>
-                <a:lnTo>
-                  <a:pt x="146297" y="81595"/>
-                </a:lnTo>
-                <a:lnTo>
-                  <a:pt x="233092" y="84676"/>
-                </a:lnTo>
-                <a:lnTo>
-                  <a:pt x="164685" y="138185"/>
-                </a:lnTo>
-                <a:lnTo>
-                  <a:pt x="188576" y="221684"/>
-                </a:lnTo>
-                <a:lnTo>
-                  <a:pt x="116546" y="173160"/>
-                </a:lnTo>
-                <a:lnTo>
-                  <a:pt x="44516" y="221684"/>
-                </a:lnTo>
-                <a:lnTo>
-                  <a:pt x="68407" y="138185"/>
-                </a:lnTo>
-                <a:lnTo>
-                  <a:pt x="0" y="84676"/>
-                </a:lnTo>
-                <a:lnTo>
-                  <a:pt x="86795" y="81595"/>
-                </a:lnTo>
-                <a:close/>
-              </a:path>
-            </a:pathLst>
-          </a:custGeom>
+          </a:prstGeom>
           <a:solidFill>
-            <a:srgbClr val="666666"/>
+            <a:srgbClr val="82D5FF"/>
           </a:solidFill>
           <a:ln>
             <a:noFill/>
@@ -3263,14 +3186,507 @@
       </p:sp>
       <p:sp>
         <p:nvSpPr>
-          <p:cNvPr id="5" name="텍스트"/>
+          <p:cNvPr id="5" name="Oval 4"/>
+          <p:cNvSpPr/>
+          <p:nvPr/>
+        </p:nvSpPr>
+        <p:spPr>
+          <a:xfrm>
+            <a:off x="2646000" y="536400"/>
+            <a:ext cx="36000" cy="36000"/>
+          </a:xfrm>
+          <a:prstGeom prst="ellipse">
+            <a:avLst/>
+          </a:prstGeom>
+          <a:solidFill>
+            <a:srgbClr val="12151C"/>
+          </a:solidFill>
+          <a:ln>
+            <a:noFill/>
+          </a:ln>
+        </p:spPr>
+        <p:txBody>
+          <a:bodyPr rtlCol="0" anchor="ctr"/>
+          <a:lstStyle/>
+          <a:p>
+            <a:pPr algn="ctr"/>
+          </a:p>
+        </p:txBody>
+      </p:sp>
+      <p:sp>
+        <p:nvSpPr>
+          <p:cNvPr id="6" name="Oval 5"/>
+          <p:cNvSpPr/>
+          <p:nvPr/>
+        </p:nvSpPr>
+        <p:spPr>
+          <a:xfrm>
+            <a:off x="2746800" y="234000"/>
+            <a:ext cx="36000" cy="36000"/>
+          </a:xfrm>
+          <a:prstGeom prst="ellipse">
+            <a:avLst/>
+          </a:prstGeom>
+          <a:solidFill>
+            <a:srgbClr val="82D5FF"/>
+          </a:solidFill>
+          <a:ln>
+            <a:noFill/>
+          </a:ln>
+        </p:spPr>
+        <p:txBody>
+          <a:bodyPr rtlCol="0" anchor="ctr"/>
+          <a:lstStyle/>
+          <a:p>
+            <a:pPr algn="ctr"/>
+          </a:p>
+        </p:txBody>
+      </p:sp>
+      <p:sp>
+        <p:nvSpPr>
+          <p:cNvPr id="7" name="Oval 6"/>
+          <p:cNvSpPr/>
+          <p:nvPr/>
+        </p:nvSpPr>
+        <p:spPr>
+          <a:xfrm>
+            <a:off x="2746800" y="334800"/>
+            <a:ext cx="36000" cy="36000"/>
+          </a:xfrm>
+          <a:prstGeom prst="ellipse">
+            <a:avLst/>
+          </a:prstGeom>
+          <a:solidFill>
+            <a:srgbClr val="82D5FF"/>
+          </a:solidFill>
+          <a:ln>
+            <a:noFill/>
+          </a:ln>
+        </p:spPr>
+        <p:txBody>
+          <a:bodyPr rtlCol="0" anchor="ctr"/>
+          <a:lstStyle/>
+          <a:p>
+            <a:pPr algn="ctr"/>
+          </a:p>
+        </p:txBody>
+      </p:sp>
+      <p:sp>
+        <p:nvSpPr>
+          <p:cNvPr id="8" name="Oval 7"/>
+          <p:cNvSpPr/>
+          <p:nvPr/>
+        </p:nvSpPr>
+        <p:spPr>
+          <a:xfrm>
+            <a:off x="2746800" y="435600"/>
+            <a:ext cx="36000" cy="36000"/>
+          </a:xfrm>
+          <a:prstGeom prst="ellipse">
+            <a:avLst/>
+          </a:prstGeom>
+          <a:solidFill>
+            <a:srgbClr val="12151C"/>
+          </a:solidFill>
+          <a:ln>
+            <a:noFill/>
+          </a:ln>
+        </p:spPr>
+        <p:txBody>
+          <a:bodyPr rtlCol="0" anchor="ctr"/>
+          <a:lstStyle/>
+          <a:p>
+            <a:pPr algn="ctr"/>
+          </a:p>
+        </p:txBody>
+      </p:sp>
+      <p:sp>
+        <p:nvSpPr>
+          <p:cNvPr id="9" name="Oval 8"/>
+          <p:cNvSpPr/>
+          <p:nvPr/>
+        </p:nvSpPr>
+        <p:spPr>
+          <a:xfrm>
+            <a:off x="2746800" y="536400"/>
+            <a:ext cx="36000" cy="36000"/>
+          </a:xfrm>
+          <a:prstGeom prst="ellipse">
+            <a:avLst/>
+          </a:prstGeom>
+          <a:solidFill>
+            <a:srgbClr val="82D5FF"/>
+          </a:solidFill>
+          <a:ln>
+            <a:noFill/>
+          </a:ln>
+        </p:spPr>
+        <p:txBody>
+          <a:bodyPr rtlCol="0" anchor="ctr"/>
+          <a:lstStyle/>
+          <a:p>
+            <a:pPr algn="ctr"/>
+          </a:p>
+        </p:txBody>
+      </p:sp>
+      <p:sp>
+        <p:nvSpPr>
+          <p:cNvPr id="10" name="Oval 9"/>
+          <p:cNvSpPr/>
+          <p:nvPr/>
+        </p:nvSpPr>
+        <p:spPr>
+          <a:xfrm>
+            <a:off x="2847600" y="234000"/>
+            <a:ext cx="36000" cy="36000"/>
+          </a:xfrm>
+          <a:prstGeom prst="ellipse">
+            <a:avLst/>
+          </a:prstGeom>
+          <a:solidFill>
+            <a:srgbClr val="82D5FF"/>
+          </a:solidFill>
+          <a:ln>
+            <a:noFill/>
+          </a:ln>
+        </p:spPr>
+        <p:txBody>
+          <a:bodyPr rtlCol="0" anchor="ctr"/>
+          <a:lstStyle/>
+          <a:p>
+            <a:pPr algn="ctr"/>
+          </a:p>
+        </p:txBody>
+      </p:sp>
+      <p:sp>
+        <p:nvSpPr>
+          <p:cNvPr id="11" name="Oval 10"/>
+          <p:cNvSpPr/>
+          <p:nvPr/>
+        </p:nvSpPr>
+        <p:spPr>
+          <a:xfrm>
+            <a:off x="2847600" y="334800"/>
+            <a:ext cx="36000" cy="36000"/>
+          </a:xfrm>
+          <a:prstGeom prst="ellipse">
+            <a:avLst/>
+          </a:prstGeom>
+          <a:solidFill>
+            <a:srgbClr val="12151C"/>
+          </a:solidFill>
+          <a:ln>
+            <a:noFill/>
+          </a:ln>
+        </p:spPr>
+        <p:txBody>
+          <a:bodyPr rtlCol="0" anchor="ctr"/>
+          <a:lstStyle/>
+          <a:p>
+            <a:pPr algn="ctr"/>
+          </a:p>
+        </p:txBody>
+      </p:sp>
+      <p:sp>
+        <p:nvSpPr>
+          <p:cNvPr id="12" name="Oval 11"/>
+          <p:cNvSpPr/>
+          <p:nvPr/>
+        </p:nvSpPr>
+        <p:spPr>
+          <a:xfrm>
+            <a:off x="2847600" y="435600"/>
+            <a:ext cx="36000" cy="36000"/>
+          </a:xfrm>
+          <a:prstGeom prst="ellipse">
+            <a:avLst/>
+          </a:prstGeom>
+          <a:solidFill>
+            <a:srgbClr val="82D5FF"/>
+          </a:solidFill>
+          <a:ln>
+            <a:noFill/>
+          </a:ln>
+        </p:spPr>
+        <p:txBody>
+          <a:bodyPr rtlCol="0" anchor="ctr"/>
+          <a:lstStyle/>
+          <a:p>
+            <a:pPr algn="ctr"/>
+          </a:p>
+        </p:txBody>
+      </p:sp>
+      <p:sp>
+        <p:nvSpPr>
+          <p:cNvPr id="13" name="Oval 12"/>
+          <p:cNvSpPr/>
+          <p:nvPr/>
+        </p:nvSpPr>
+        <p:spPr>
+          <a:xfrm>
+            <a:off x="2847600" y="536400"/>
+            <a:ext cx="36000" cy="36000"/>
+          </a:xfrm>
+          <a:prstGeom prst="ellipse">
+            <a:avLst/>
+          </a:prstGeom>
+          <a:solidFill>
+            <a:srgbClr val="82D5FF"/>
+          </a:solidFill>
+          <a:ln>
+            <a:noFill/>
+          </a:ln>
+        </p:spPr>
+        <p:txBody>
+          <a:bodyPr rtlCol="0" anchor="ctr"/>
+          <a:lstStyle/>
+          <a:p>
+            <a:pPr algn="ctr"/>
+          </a:p>
+        </p:txBody>
+      </p:sp>
+      <p:sp>
+        <p:nvSpPr>
+          <p:cNvPr id="14" name="Oval 13"/>
+          <p:cNvSpPr/>
+          <p:nvPr/>
+        </p:nvSpPr>
+        <p:spPr>
+          <a:xfrm>
+            <a:off x="2948400" y="234000"/>
+            <a:ext cx="36000" cy="36000"/>
+          </a:xfrm>
+          <a:prstGeom prst="ellipse">
+            <a:avLst/>
+          </a:prstGeom>
+          <a:solidFill>
+            <a:srgbClr val="12151C"/>
+          </a:solidFill>
+          <a:ln>
+            <a:noFill/>
+          </a:ln>
+        </p:spPr>
+        <p:txBody>
+          <a:bodyPr rtlCol="0" anchor="ctr"/>
+          <a:lstStyle/>
+          <a:p>
+            <a:pPr algn="ctr"/>
+          </a:p>
+        </p:txBody>
+      </p:sp>
+      <p:sp>
+        <p:nvSpPr>
+          <p:cNvPr id="15" name="Oval 14"/>
+          <p:cNvSpPr/>
+          <p:nvPr/>
+        </p:nvSpPr>
+        <p:spPr>
+          <a:xfrm>
+            <a:off x="2948400" y="334800"/>
+            <a:ext cx="36000" cy="36000"/>
+          </a:xfrm>
+          <a:prstGeom prst="ellipse">
+            <a:avLst/>
+          </a:prstGeom>
+          <a:solidFill>
+            <a:srgbClr val="82D5FF"/>
+          </a:solidFill>
+          <a:ln>
+            <a:noFill/>
+          </a:ln>
+        </p:spPr>
+        <p:txBody>
+          <a:bodyPr rtlCol="0" anchor="ctr"/>
+          <a:lstStyle/>
+          <a:p>
+            <a:pPr algn="ctr"/>
+          </a:p>
+        </p:txBody>
+      </p:sp>
+      <p:sp>
+        <p:nvSpPr>
+          <p:cNvPr id="16" name="Oval 15"/>
+          <p:cNvSpPr/>
+          <p:nvPr/>
+        </p:nvSpPr>
+        <p:spPr>
+          <a:xfrm>
+            <a:off x="2948400" y="435600"/>
+            <a:ext cx="36000" cy="36000"/>
+          </a:xfrm>
+          <a:prstGeom prst="ellipse">
+            <a:avLst/>
+          </a:prstGeom>
+          <a:solidFill>
+            <a:srgbClr val="82D5FF"/>
+          </a:solidFill>
+          <a:ln>
+            <a:noFill/>
+          </a:ln>
+        </p:spPr>
+        <p:txBody>
+          <a:bodyPr rtlCol="0" anchor="ctr"/>
+          <a:lstStyle/>
+          <a:p>
+            <a:pPr algn="ctr"/>
+          </a:p>
+        </p:txBody>
+      </p:sp>
+      <p:sp>
+        <p:nvSpPr>
+          <p:cNvPr id="17" name="Oval 16"/>
+          <p:cNvSpPr/>
+          <p:nvPr/>
+        </p:nvSpPr>
+        <p:spPr>
+          <a:xfrm>
+            <a:off x="2948400" y="536400"/>
+            <a:ext cx="36000" cy="36000"/>
+          </a:xfrm>
+          <a:prstGeom prst="ellipse">
+            <a:avLst/>
+          </a:prstGeom>
+          <a:solidFill>
+            <a:srgbClr val="12151C"/>
+          </a:solidFill>
+          <a:ln>
+            <a:noFill/>
+          </a:ln>
+        </p:spPr>
+        <p:txBody>
+          <a:bodyPr rtlCol="0" anchor="ctr"/>
+          <a:lstStyle/>
+          <a:p>
+            <a:pPr algn="ctr"/>
+          </a:p>
+        </p:txBody>
+      </p:sp>
+      <p:sp>
+        <p:nvSpPr>
+          <p:cNvPr id="18" name="Oval 17"/>
+          <p:cNvSpPr/>
+          <p:nvPr/>
+        </p:nvSpPr>
+        <p:spPr>
+          <a:xfrm>
+            <a:off x="3049200" y="234000"/>
+            <a:ext cx="36000" cy="36000"/>
+          </a:xfrm>
+          <a:prstGeom prst="ellipse">
+            <a:avLst/>
+          </a:prstGeom>
+          <a:solidFill>
+            <a:srgbClr val="82D5FF"/>
+          </a:solidFill>
+          <a:ln>
+            <a:noFill/>
+          </a:ln>
+        </p:spPr>
+        <p:txBody>
+          <a:bodyPr rtlCol="0" anchor="ctr"/>
+          <a:lstStyle/>
+          <a:p>
+            <a:pPr algn="ctr"/>
+          </a:p>
+        </p:txBody>
+      </p:sp>
+      <p:sp>
+        <p:nvSpPr>
+          <p:cNvPr id="19" name="Oval 18"/>
+          <p:cNvSpPr/>
+          <p:nvPr/>
+        </p:nvSpPr>
+        <p:spPr>
+          <a:xfrm>
+            <a:off x="3049200" y="334800"/>
+            <a:ext cx="36000" cy="36000"/>
+          </a:xfrm>
+          <a:prstGeom prst="ellipse">
+            <a:avLst/>
+          </a:prstGeom>
+          <a:solidFill>
+            <a:srgbClr val="82D5FF"/>
+          </a:solidFill>
+          <a:ln>
+            <a:noFill/>
+          </a:ln>
+        </p:spPr>
+        <p:txBody>
+          <a:bodyPr rtlCol="0" anchor="ctr"/>
+          <a:lstStyle/>
+          <a:p>
+            <a:pPr algn="ctr"/>
+          </a:p>
+        </p:txBody>
+      </p:sp>
+      <p:sp>
+        <p:nvSpPr>
+          <p:cNvPr id="20" name="Oval 19"/>
+          <p:cNvSpPr/>
+          <p:nvPr/>
+        </p:nvSpPr>
+        <p:spPr>
+          <a:xfrm>
+            <a:off x="3049200" y="435600"/>
+            <a:ext cx="36000" cy="36000"/>
+          </a:xfrm>
+          <a:prstGeom prst="ellipse">
+            <a:avLst/>
+          </a:prstGeom>
+          <a:solidFill>
+            <a:srgbClr val="12151C"/>
+          </a:solidFill>
+          <a:ln>
+            <a:noFill/>
+          </a:ln>
+        </p:spPr>
+        <p:txBody>
+          <a:bodyPr rtlCol="0" anchor="ctr"/>
+          <a:lstStyle/>
+          <a:p>
+            <a:pPr algn="ctr"/>
+          </a:p>
+        </p:txBody>
+      </p:sp>
+      <p:sp>
+        <p:nvSpPr>
+          <p:cNvPr id="21" name="Oval 20"/>
+          <p:cNvSpPr/>
+          <p:nvPr/>
+        </p:nvSpPr>
+        <p:spPr>
+          <a:xfrm>
+            <a:off x="3049200" y="536400"/>
+            <a:ext cx="36000" cy="36000"/>
+          </a:xfrm>
+          <a:prstGeom prst="ellipse">
+            <a:avLst/>
+          </a:prstGeom>
+          <a:solidFill>
+            <a:srgbClr val="82D5FF"/>
+          </a:solidFill>
+          <a:ln>
+            <a:noFill/>
+          </a:ln>
+        </p:spPr>
+        <p:txBody>
+          <a:bodyPr rtlCol="0" anchor="ctr"/>
+          <a:lstStyle/>
+          <a:p>
+            <a:pPr algn="ctr"/>
+          </a:p>
+        </p:txBody>
+      </p:sp>
+      <p:sp>
+        <p:nvSpPr>
+          <p:cNvPr id="22" name="텍스트"/>
           <p:cNvSpPr txBox="1"/>
           <p:nvPr/>
         </p:nvSpPr>
         <p:spPr>
           <a:xfrm>
-            <a:off x="252000" y="201600"/>
-            <a:ext cx="1800000" cy="100800"/>
+            <a:off x="252000" y="223200"/>
+            <a:ext cx="1440000" cy="133351"/>
           </a:xfrm>
           <a:prstGeom prst="rect">
             <a:avLst/>
@@ -3285,13 +3701,13 @@
           <a:p>
             <a:pPr algn="l">
               <a:lnSpc>
-                <a:spcPts val="1087"/>
+                <a:spcPts val="1015"/>
               </a:lnSpc>
             </a:pPr>
             <a:r>
-              <a:rPr sz="750" b="1" spc="150">
+              <a:rPr sz="700" b="1" spc="200">
                 <a:solidFill>
-                  <a:srgbClr val="FFFFFF"/>
+                  <a:srgbClr val="1F3B4E"/>
                 </a:solidFill>
                 <a:latin typeface="맑은 고딕"/>
                 <a:ea typeface="맑은 고딕"/>
@@ -3303,14 +3719,14 @@
       </p:sp>
       <p:sp>
         <p:nvSpPr>
-          <p:cNvPr id="6" name="텍스트"/>
+          <p:cNvPr id="23" name="텍스트"/>
           <p:cNvSpPr txBox="1"/>
           <p:nvPr/>
         </p:nvSpPr>
         <p:spPr>
           <a:xfrm>
-            <a:off x="252000" y="360000"/>
-            <a:ext cx="2016000" cy="313692"/>
+            <a:off x="252000" y="770400"/>
+            <a:ext cx="2016000" cy="360000"/>
           </a:xfrm>
           <a:prstGeom prst="rect">
             <a:avLst/>
@@ -3325,13 +3741,13 @@
           <a:p>
             <a:pPr algn="l">
               <a:lnSpc>
-                <a:spcPts val="2755"/>
+                <a:spcPts val="3190"/>
               </a:lnSpc>
             </a:pPr>
             <a:r>
-              <a:rPr sz="1900" b="1" spc="50">
+              <a:rPr sz="2200" b="1">
                 <a:solidFill>
-                  <a:srgbClr val="FFFFFF"/>
+                  <a:srgbClr val="12151C"/>
                 </a:solidFill>
                 <a:latin typeface="맑은 고딕"/>
                 <a:ea typeface="맑은 고딕"/>
@@ -3343,14 +3759,14 @@
       </p:sp>
       <p:sp>
         <p:nvSpPr>
-          <p:cNvPr id="7" name="텍스트"/>
+          <p:cNvPr id="24" name="텍스트"/>
           <p:cNvSpPr txBox="1"/>
           <p:nvPr/>
         </p:nvSpPr>
         <p:spPr>
           <a:xfrm>
-            <a:off x="252000" y="655200"/>
-            <a:ext cx="1872000" cy="122400"/>
+            <a:off x="252000" y="1173600"/>
+            <a:ext cx="2016000" cy="171451"/>
           </a:xfrm>
           <a:prstGeom prst="rect">
             <a:avLst/>
@@ -3365,13 +3781,13 @@
           <a:p>
             <a:pPr algn="l">
               <a:lnSpc>
-                <a:spcPts val="1232"/>
+                <a:spcPts val="1305"/>
               </a:lnSpc>
             </a:pPr>
             <a:r>
-              <a:rPr sz="850" b="1">
+              <a:rPr sz="900" b="0">
                 <a:solidFill>
-                  <a:srgbClr val="FFFFFF"/>
+                  <a:srgbClr val="1F3B4E"/>
                 </a:solidFill>
                 <a:latin typeface="맑은 고딕"/>
                 <a:ea typeface="맑은 고딕"/>
@@ -3383,43 +3799,14 @@
       </p:sp>
       <p:sp>
         <p:nvSpPr>
-          <p:cNvPr id="8" name="Rectangle 7"/>
-          <p:cNvSpPr/>
-          <p:nvPr/>
-        </p:nvSpPr>
-        <p:spPr>
-          <a:xfrm>
-            <a:off x="252000" y="864000"/>
-            <a:ext cx="230400" cy="14400"/>
-          </a:xfrm>
-          <a:prstGeom prst="rect">
-            <a:avLst/>
-          </a:prstGeom>
-          <a:solidFill>
-            <a:srgbClr val="F8F2C9"/>
-          </a:solidFill>
-          <a:ln>
-            <a:noFill/>
-          </a:ln>
-        </p:spPr>
-        <p:txBody>
-          <a:bodyPr rtlCol="0" anchor="ctr"/>
-          <a:lstStyle/>
-          <a:p>
-            <a:pPr algn="ctr"/>
-          </a:p>
-        </p:txBody>
-      </p:sp>
-      <p:sp>
-        <p:nvSpPr>
-          <p:cNvPr id="9" name="텍스트"/>
+          <p:cNvPr id="25" name="텍스트"/>
           <p:cNvSpPr txBox="1"/>
           <p:nvPr/>
         </p:nvSpPr>
         <p:spPr>
           <a:xfrm>
-            <a:off x="252000" y="1044000"/>
-            <a:ext cx="122400" cy="168911"/>
+            <a:off x="1620000" y="1339200"/>
+            <a:ext cx="1368000" cy="133351"/>
           </a:xfrm>
           <a:prstGeom prst="rect">
             <a:avLst/>
@@ -3432,55 +3819,15 @@
           </a:bodyPr>
           <a:lstStyle/>
           <a:p>
-            <a:pPr algn="l">
+            <a:pPr algn="r">
               <a:lnSpc>
                 <a:spcPts val="1015"/>
               </a:lnSpc>
             </a:pPr>
             <a:r>
-              <a:rPr sz="700" b="1">
-                <a:solidFill>
-                  <a:srgbClr val="FFFFFF"/>
-                </a:solidFill>
-                <a:latin typeface="맑은 고딕"/>
-                <a:ea typeface="맑은 고딕"/>
-              </a:rPr>
-              <a:t>T</a:t>
-            </a:r>
-          </a:p>
-        </p:txBody>
-      </p:sp>
-      <p:sp>
-        <p:nvSpPr>
-          <p:cNvPr id="10" name="텍스트"/>
-          <p:cNvSpPr txBox="1"/>
-          <p:nvPr/>
-        </p:nvSpPr>
-        <p:spPr>
-          <a:xfrm>
-            <a:off x="396000" y="1044000"/>
-            <a:ext cx="1584000" cy="168911"/>
-          </a:xfrm>
-          <a:prstGeom prst="rect">
-            <a:avLst/>
-          </a:prstGeom>
-          <a:noFill/>
-        </p:spPr>
-        <p:txBody>
-          <a:bodyPr wrap="square" lIns="0" rIns="0" tIns="0" bIns="0" anchor="t">
-            <a:spAutoFit/>
-          </a:bodyPr>
-          <a:lstStyle/>
-          <a:p>
-            <a:pPr algn="l">
-              <a:lnSpc>
-                <a:spcPts val="1015"/>
-              </a:lnSpc>
-            </a:pPr>
-            <a:r>
               <a:rPr sz="700" b="0">
                 <a:solidFill>
-                  <a:srgbClr val="FFFFFF"/>
+                  <a:srgbClr val="12151C"/>
                 </a:solidFill>
                 <a:latin typeface="맑은 고딕"/>
                 <a:ea typeface="맑은 고딕"/>
@@ -3492,14 +3839,14 @@
       </p:sp>
       <p:sp>
         <p:nvSpPr>
-          <p:cNvPr id="11" name="텍스트"/>
+          <p:cNvPr id="26" name="텍스트"/>
           <p:cNvSpPr txBox="1"/>
           <p:nvPr/>
         </p:nvSpPr>
         <p:spPr>
           <a:xfrm>
-            <a:off x="252000" y="1212911"/>
-            <a:ext cx="122400" cy="168911"/>
+            <a:off x="1620000" y="1476000"/>
+            <a:ext cx="1368000" cy="133351"/>
           </a:xfrm>
           <a:prstGeom prst="rect">
             <a:avLst/>
@@ -3512,55 +3859,15 @@
           </a:bodyPr>
           <a:lstStyle/>
           <a:p>
-            <a:pPr algn="l">
+            <a:pPr algn="r">
               <a:lnSpc>
                 <a:spcPts val="1015"/>
               </a:lnSpc>
             </a:pPr>
             <a:r>
-              <a:rPr sz="700" b="1">
-                <a:solidFill>
-                  <a:srgbClr val="FFFFFF"/>
-                </a:solidFill>
-                <a:latin typeface="맑은 고딕"/>
-                <a:ea typeface="맑은 고딕"/>
-              </a:rPr>
-              <a:t>E</a:t>
-            </a:r>
-          </a:p>
-        </p:txBody>
-      </p:sp>
-      <p:sp>
-        <p:nvSpPr>
-          <p:cNvPr id="12" name="텍스트"/>
-          <p:cNvSpPr txBox="1"/>
-          <p:nvPr/>
-        </p:nvSpPr>
-        <p:spPr>
-          <a:xfrm>
-            <a:off x="396000" y="1212911"/>
-            <a:ext cx="1584000" cy="168911"/>
-          </a:xfrm>
-          <a:prstGeom prst="rect">
-            <a:avLst/>
-          </a:prstGeom>
-          <a:noFill/>
-        </p:spPr>
-        <p:txBody>
-          <a:bodyPr wrap="square" lIns="0" rIns="0" tIns="0" bIns="0" anchor="t">
-            <a:spAutoFit/>
-          </a:bodyPr>
-          <a:lstStyle/>
-          <a:p>
-            <a:pPr algn="l">
-              <a:lnSpc>
-                <a:spcPts val="1015"/>
-              </a:lnSpc>
-            </a:pPr>
-            <a:r>
               <a:rPr sz="700" b="0">
                 <a:solidFill>
-                  <a:srgbClr val="FFFFFF"/>
+                  <a:srgbClr val="12151C"/>
                 </a:solidFill>
                 <a:latin typeface="맑은 고딕"/>
                 <a:ea typeface="맑은 고딕"/>
@@ -3572,14 +3879,14 @@
       </p:sp>
       <p:sp>
         <p:nvSpPr>
-          <p:cNvPr id="13" name="텍스트"/>
+          <p:cNvPr id="27" name="텍스트"/>
           <p:cNvSpPr txBox="1"/>
           <p:nvPr/>
         </p:nvSpPr>
         <p:spPr>
           <a:xfrm>
-            <a:off x="252000" y="1381822"/>
-            <a:ext cx="122400" cy="168911"/>
+            <a:off x="1620000" y="1612800"/>
+            <a:ext cx="1368000" cy="133351"/>
           </a:xfrm>
           <a:prstGeom prst="rect">
             <a:avLst/>
@@ -3592,55 +3899,15 @@
           </a:bodyPr>
           <a:lstStyle/>
           <a:p>
-            <a:pPr algn="l">
+            <a:pPr algn="r">
               <a:lnSpc>
                 <a:spcPts val="1015"/>
               </a:lnSpc>
             </a:pPr>
             <a:r>
-              <a:rPr sz="700" b="1">
-                <a:solidFill>
-                  <a:srgbClr val="FFFFFF"/>
-                </a:solidFill>
-                <a:latin typeface="맑은 고딕"/>
-                <a:ea typeface="맑은 고딕"/>
-              </a:rPr>
-              <a:t>A</a:t>
-            </a:r>
-          </a:p>
-        </p:txBody>
-      </p:sp>
-      <p:sp>
-        <p:nvSpPr>
-          <p:cNvPr id="14" name="텍스트"/>
-          <p:cNvSpPr txBox="1"/>
-          <p:nvPr/>
-        </p:nvSpPr>
-        <p:spPr>
-          <a:xfrm>
-            <a:off x="396000" y="1381822"/>
-            <a:ext cx="1584000" cy="168911"/>
-          </a:xfrm>
-          <a:prstGeom prst="rect">
-            <a:avLst/>
-          </a:prstGeom>
-          <a:noFill/>
-        </p:spPr>
-        <p:txBody>
-          <a:bodyPr wrap="square" lIns="0" rIns="0" tIns="0" bIns="0" anchor="t">
-            <a:spAutoFit/>
-          </a:bodyPr>
-          <a:lstStyle/>
-          <a:p>
-            <a:pPr algn="l">
-              <a:lnSpc>
-                <a:spcPts val="1015"/>
-              </a:lnSpc>
-            </a:pPr>
-            <a:r>
               <a:rPr sz="700" b="0">
                 <a:solidFill>
-                  <a:srgbClr val="FFFFFF"/>
+                  <a:srgbClr val="12151C"/>
                 </a:solidFill>
                 <a:latin typeface="맑은 고딕"/>
                 <a:ea typeface="맑은 고딕"/>
@@ -3664,7 +3931,7 @@
     <p:bg>
       <p:bgPr>
         <a:solidFill>
-          <a:srgbClr val="605610"/>
+          <a:srgbClr val="4CC3FF"/>
         </a:solidFill>
         <a:effectLst/>
       </p:bgPr>
@@ -3678,59 +3945,20 @@
       <p:grpSpPr/>
       <p:sp>
         <p:nvSpPr>
-          <p:cNvPr id="2" name="Freeform 1"/>
+          <p:cNvPr id="2" name="Oval 1"/>
           <p:cNvSpPr/>
           <p:nvPr/>
         </p:nvSpPr>
         <p:spPr>
           <a:xfrm>
-            <a:off x="927022" y="171360"/>
-            <a:ext cx="1385956" cy="1318122"/>
-          </a:xfrm>
-          <a:custGeom>
+            <a:off x="1591200" y="511200"/>
+            <a:ext cx="57600" cy="57600"/>
+          </a:xfrm>
+          <a:prstGeom prst="ellipse">
             <a:avLst/>
-            <a:gdLst/>
-            <a:ahLst/>
-            <a:cxnLst/>
-            <a:rect l="l" t="t" r="r" b="b"/>
-            <a:pathLst>
-              <a:path w="1385956" h="1318122">
-                <a:moveTo>
-                  <a:pt x="692978" y="0"/>
-                </a:moveTo>
-                <a:lnTo>
-                  <a:pt x="869878" y="485158"/>
-                </a:lnTo>
-                <a:lnTo>
-                  <a:pt x="1385956" y="503478"/>
-                </a:lnTo>
-                <a:lnTo>
-                  <a:pt x="979208" y="821642"/>
-                </a:lnTo>
-                <a:lnTo>
-                  <a:pt x="1121262" y="1318122"/>
-                </a:lnTo>
-                <a:lnTo>
-                  <a:pt x="692978" y="1029600"/>
-                </a:lnTo>
-                <a:lnTo>
-                  <a:pt x="264694" y="1318122"/>
-                </a:lnTo>
-                <a:lnTo>
-                  <a:pt x="406748" y="821642"/>
-                </a:lnTo>
-                <a:lnTo>
-                  <a:pt x="0" y="503478"/>
-                </a:lnTo>
-                <a:lnTo>
-                  <a:pt x="516078" y="485158"/>
-                </a:lnTo>
-                <a:close/>
-              </a:path>
-            </a:pathLst>
-          </a:custGeom>
+          </a:prstGeom>
           <a:solidFill>
-            <a:srgbClr val="CCBD5D"/>
+            <a:srgbClr val="12151C"/>
           </a:solidFill>
           <a:ln>
             <a:noFill/>
@@ -3746,45 +3974,14 @@
       </p:sp>
       <p:sp>
         <p:nvSpPr>
-          <p:cNvPr id="3" name="Rectangle 2"/>
-          <p:cNvSpPr/>
-          <p:nvPr/>
-        </p:nvSpPr>
-        <p:spPr>
-          <a:xfrm>
-            <a:off x="0" y="0"/>
-            <a:ext cx="3240000" cy="1800000"/>
-          </a:xfrm>
-          <a:prstGeom prst="rect">
-            <a:avLst/>
-          </a:prstGeom>
-          <a:solidFill>
-            <a:srgbClr val="605610">
-              <a:alpha val="90000"/>
-            </a:srgbClr>
-          </a:solidFill>
-          <a:ln>
-            <a:noFill/>
-          </a:ln>
-        </p:spPr>
-        <p:txBody>
-          <a:bodyPr rtlCol="0" anchor="ctr"/>
-          <a:lstStyle/>
-          <a:p>
-            <a:pPr algn="ctr"/>
-          </a:p>
-        </p:txBody>
-      </p:sp>
-      <p:sp>
-        <p:nvSpPr>
-          <p:cNvPr id="4" name="텍스트"/>
+          <p:cNvPr id="3" name="텍스트"/>
           <p:cNvSpPr txBox="1"/>
           <p:nvPr/>
         </p:nvSpPr>
         <p:spPr>
           <a:xfrm>
-            <a:off x="396000" y="612000"/>
-            <a:ext cx="2448000" cy="432000"/>
+            <a:off x="396000" y="684000"/>
+            <a:ext cx="2448000" cy="504000"/>
           </a:xfrm>
           <a:prstGeom prst="rect">
             <a:avLst/>
@@ -3792,7 +3989,7 @@
           <a:noFill/>
         </p:spPr>
         <p:txBody>
-          <a:bodyPr wrap="square" lIns="0" rIns="0" tIns="0" bIns="0" anchor="ctr">
+          <a:bodyPr wrap="square" lIns="0" rIns="0" tIns="0" bIns="0" anchor="t">
             <a:spAutoFit/>
           </a:bodyPr>
           <a:lstStyle/>
@@ -3805,10 +4002,10 @@
             <a:r>
               <a:rPr sz="1200" b="1">
                 <a:solidFill>
-                  <a:srgbClr val="FFFFFF"/>
+                  <a:srgbClr val="12151C"/>
                 </a:solidFill>
-                <a:latin typeface="바탕"/>
-                <a:ea typeface="바탕"/>
+                <a:latin typeface="맑은 고딕"/>
+                <a:ea typeface="맑은 고딕"/>
               </a:rPr>
               <a:t>각자의 속도를 존중합니다</a:t>
             </a:r>
@@ -3817,43 +4014,14 @@
       </p:sp>
       <p:sp>
         <p:nvSpPr>
-          <p:cNvPr id="5" name="Rectangle 4"/>
-          <p:cNvSpPr/>
-          <p:nvPr/>
-        </p:nvSpPr>
-        <p:spPr>
-          <a:xfrm>
-            <a:off x="1512000" y="1173600"/>
-            <a:ext cx="216000" cy="10800"/>
-          </a:xfrm>
-          <a:prstGeom prst="rect">
-            <a:avLst/>
-          </a:prstGeom>
-          <a:solidFill>
-            <a:srgbClr val="CCBD5D"/>
-          </a:solidFill>
-          <a:ln>
-            <a:noFill/>
-          </a:ln>
-        </p:spPr>
-        <p:txBody>
-          <a:bodyPr rtlCol="0" anchor="ctr"/>
-          <a:lstStyle/>
-          <a:p>
-            <a:pPr algn="ctr"/>
-          </a:p>
-        </p:txBody>
-      </p:sp>
-      <p:sp>
-        <p:nvSpPr>
-          <p:cNvPr id="6" name="텍스트"/>
+          <p:cNvPr id="4" name="텍스트"/>
           <p:cNvSpPr txBox="1"/>
           <p:nvPr/>
         </p:nvSpPr>
         <p:spPr>
           <a:xfrm>
-            <a:off x="360000" y="1288800"/>
-            <a:ext cx="2520000" cy="108000"/>
+            <a:off x="360000" y="1339200"/>
+            <a:ext cx="2520000" cy="123826"/>
           </a:xfrm>
           <a:prstGeom prst="rect">
             <a:avLst/>
@@ -3868,13 +4036,13 @@
           <a:p>
             <a:pPr algn="ctr">
               <a:lnSpc>
-                <a:spcPts val="1087"/>
+                <a:spcPts val="942"/>
               </a:lnSpc>
             </a:pPr>
             <a:r>
-              <a:rPr sz="750" b="1" spc="300">
+              <a:rPr sz="650" b="1" spc="300">
                 <a:solidFill>
-                  <a:srgbClr val="CFCDB8"/>
+                  <a:srgbClr val="1F3B4E"/>
                 </a:solidFill>
                 <a:latin typeface="맑은 고딕"/>
                 <a:ea typeface="맑은 고딕"/>

--- a/public/fun/cards/teacher/teacher-24.pptx
+++ b/public/fun/cards/teacher/teacher-24.pptx
@@ -3099,16 +3099,45 @@
       <p:grpSpPr/>
       <p:sp>
         <p:nvSpPr>
-          <p:cNvPr id="2" name="Oval 1"/>
+          <p:cNvPr id="2" name="Rectangle 1"/>
           <p:cNvSpPr/>
           <p:nvPr/>
         </p:nvSpPr>
         <p:spPr>
           <a:xfrm>
-            <a:off x="2646000" y="234000"/>
-            <a:ext cx="36000" cy="36000"/>
-          </a:xfrm>
-          <a:prstGeom prst="ellipse">
+            <a:off x="0" y="1296000"/>
+            <a:ext cx="3240000" cy="504000"/>
+          </a:xfrm>
+          <a:prstGeom prst="rect">
+            <a:avLst/>
+          </a:prstGeom>
+          <a:solidFill>
+            <a:srgbClr val="70CFFF"/>
+          </a:solidFill>
+          <a:ln>
+            <a:noFill/>
+          </a:ln>
+        </p:spPr>
+        <p:txBody>
+          <a:bodyPr rtlCol="0" anchor="ctr"/>
+          <a:lstStyle/>
+          <a:p>
+            <a:pPr algn="ctr"/>
+          </a:p>
+        </p:txBody>
+      </p:sp>
+      <p:sp>
+        <p:nvSpPr>
+          <p:cNvPr id="3" name="Rectangle 2"/>
+          <p:cNvSpPr/>
+          <p:nvPr/>
+        </p:nvSpPr>
+        <p:spPr>
+          <a:xfrm>
+            <a:off x="0" y="1296000"/>
+            <a:ext cx="3240000" cy="14400"/>
+          </a:xfrm>
+          <a:prstGeom prst="rect">
             <a:avLst/>
           </a:prstGeom>
           <a:solidFill>
@@ -3128,565 +3157,14 @@
       </p:sp>
       <p:sp>
         <p:nvSpPr>
-          <p:cNvPr id="3" name="Oval 2"/>
-          <p:cNvSpPr/>
-          <p:nvPr/>
-        </p:nvSpPr>
-        <p:spPr>
-          <a:xfrm>
-            <a:off x="2646000" y="334800"/>
-            <a:ext cx="36000" cy="36000"/>
-          </a:xfrm>
-          <a:prstGeom prst="ellipse">
-            <a:avLst/>
-          </a:prstGeom>
-          <a:solidFill>
-            <a:srgbClr val="82D5FF"/>
-          </a:solidFill>
-          <a:ln>
-            <a:noFill/>
-          </a:ln>
-        </p:spPr>
-        <p:txBody>
-          <a:bodyPr rtlCol="0" anchor="ctr"/>
-          <a:lstStyle/>
-          <a:p>
-            <a:pPr algn="ctr"/>
-          </a:p>
-        </p:txBody>
-      </p:sp>
-      <p:sp>
-        <p:nvSpPr>
-          <p:cNvPr id="4" name="Oval 3"/>
-          <p:cNvSpPr/>
-          <p:nvPr/>
-        </p:nvSpPr>
-        <p:spPr>
-          <a:xfrm>
-            <a:off x="2646000" y="435600"/>
-            <a:ext cx="36000" cy="36000"/>
-          </a:xfrm>
-          <a:prstGeom prst="ellipse">
-            <a:avLst/>
-          </a:prstGeom>
-          <a:solidFill>
-            <a:srgbClr val="82D5FF"/>
-          </a:solidFill>
-          <a:ln>
-            <a:noFill/>
-          </a:ln>
-        </p:spPr>
-        <p:txBody>
-          <a:bodyPr rtlCol="0" anchor="ctr"/>
-          <a:lstStyle/>
-          <a:p>
-            <a:pPr algn="ctr"/>
-          </a:p>
-        </p:txBody>
-      </p:sp>
-      <p:sp>
-        <p:nvSpPr>
-          <p:cNvPr id="5" name="Oval 4"/>
-          <p:cNvSpPr/>
-          <p:nvPr/>
-        </p:nvSpPr>
-        <p:spPr>
-          <a:xfrm>
-            <a:off x="2646000" y="536400"/>
-            <a:ext cx="36000" cy="36000"/>
-          </a:xfrm>
-          <a:prstGeom prst="ellipse">
-            <a:avLst/>
-          </a:prstGeom>
-          <a:solidFill>
-            <a:srgbClr val="12151C"/>
-          </a:solidFill>
-          <a:ln>
-            <a:noFill/>
-          </a:ln>
-        </p:spPr>
-        <p:txBody>
-          <a:bodyPr rtlCol="0" anchor="ctr"/>
-          <a:lstStyle/>
-          <a:p>
-            <a:pPr algn="ctr"/>
-          </a:p>
-        </p:txBody>
-      </p:sp>
-      <p:sp>
-        <p:nvSpPr>
-          <p:cNvPr id="6" name="Oval 5"/>
-          <p:cNvSpPr/>
-          <p:nvPr/>
-        </p:nvSpPr>
-        <p:spPr>
-          <a:xfrm>
-            <a:off x="2746800" y="234000"/>
-            <a:ext cx="36000" cy="36000"/>
-          </a:xfrm>
-          <a:prstGeom prst="ellipse">
-            <a:avLst/>
-          </a:prstGeom>
-          <a:solidFill>
-            <a:srgbClr val="82D5FF"/>
-          </a:solidFill>
-          <a:ln>
-            <a:noFill/>
-          </a:ln>
-        </p:spPr>
-        <p:txBody>
-          <a:bodyPr rtlCol="0" anchor="ctr"/>
-          <a:lstStyle/>
-          <a:p>
-            <a:pPr algn="ctr"/>
-          </a:p>
-        </p:txBody>
-      </p:sp>
-      <p:sp>
-        <p:nvSpPr>
-          <p:cNvPr id="7" name="Oval 6"/>
-          <p:cNvSpPr/>
-          <p:nvPr/>
-        </p:nvSpPr>
-        <p:spPr>
-          <a:xfrm>
-            <a:off x="2746800" y="334800"/>
-            <a:ext cx="36000" cy="36000"/>
-          </a:xfrm>
-          <a:prstGeom prst="ellipse">
-            <a:avLst/>
-          </a:prstGeom>
-          <a:solidFill>
-            <a:srgbClr val="82D5FF"/>
-          </a:solidFill>
-          <a:ln>
-            <a:noFill/>
-          </a:ln>
-        </p:spPr>
-        <p:txBody>
-          <a:bodyPr rtlCol="0" anchor="ctr"/>
-          <a:lstStyle/>
-          <a:p>
-            <a:pPr algn="ctr"/>
-          </a:p>
-        </p:txBody>
-      </p:sp>
-      <p:sp>
-        <p:nvSpPr>
-          <p:cNvPr id="8" name="Oval 7"/>
-          <p:cNvSpPr/>
-          <p:nvPr/>
-        </p:nvSpPr>
-        <p:spPr>
-          <a:xfrm>
-            <a:off x="2746800" y="435600"/>
-            <a:ext cx="36000" cy="36000"/>
-          </a:xfrm>
-          <a:prstGeom prst="ellipse">
-            <a:avLst/>
-          </a:prstGeom>
-          <a:solidFill>
-            <a:srgbClr val="12151C"/>
-          </a:solidFill>
-          <a:ln>
-            <a:noFill/>
-          </a:ln>
-        </p:spPr>
-        <p:txBody>
-          <a:bodyPr rtlCol="0" anchor="ctr"/>
-          <a:lstStyle/>
-          <a:p>
-            <a:pPr algn="ctr"/>
-          </a:p>
-        </p:txBody>
-      </p:sp>
-      <p:sp>
-        <p:nvSpPr>
-          <p:cNvPr id="9" name="Oval 8"/>
-          <p:cNvSpPr/>
-          <p:nvPr/>
-        </p:nvSpPr>
-        <p:spPr>
-          <a:xfrm>
-            <a:off x="2746800" y="536400"/>
-            <a:ext cx="36000" cy="36000"/>
-          </a:xfrm>
-          <a:prstGeom prst="ellipse">
-            <a:avLst/>
-          </a:prstGeom>
-          <a:solidFill>
-            <a:srgbClr val="82D5FF"/>
-          </a:solidFill>
-          <a:ln>
-            <a:noFill/>
-          </a:ln>
-        </p:spPr>
-        <p:txBody>
-          <a:bodyPr rtlCol="0" anchor="ctr"/>
-          <a:lstStyle/>
-          <a:p>
-            <a:pPr algn="ctr"/>
-          </a:p>
-        </p:txBody>
-      </p:sp>
-      <p:sp>
-        <p:nvSpPr>
-          <p:cNvPr id="10" name="Oval 9"/>
-          <p:cNvSpPr/>
-          <p:nvPr/>
-        </p:nvSpPr>
-        <p:spPr>
-          <a:xfrm>
-            <a:off x="2847600" y="234000"/>
-            <a:ext cx="36000" cy="36000"/>
-          </a:xfrm>
-          <a:prstGeom prst="ellipse">
-            <a:avLst/>
-          </a:prstGeom>
-          <a:solidFill>
-            <a:srgbClr val="82D5FF"/>
-          </a:solidFill>
-          <a:ln>
-            <a:noFill/>
-          </a:ln>
-        </p:spPr>
-        <p:txBody>
-          <a:bodyPr rtlCol="0" anchor="ctr"/>
-          <a:lstStyle/>
-          <a:p>
-            <a:pPr algn="ctr"/>
-          </a:p>
-        </p:txBody>
-      </p:sp>
-      <p:sp>
-        <p:nvSpPr>
-          <p:cNvPr id="11" name="Oval 10"/>
-          <p:cNvSpPr/>
-          <p:nvPr/>
-        </p:nvSpPr>
-        <p:spPr>
-          <a:xfrm>
-            <a:off x="2847600" y="334800"/>
-            <a:ext cx="36000" cy="36000"/>
-          </a:xfrm>
-          <a:prstGeom prst="ellipse">
-            <a:avLst/>
-          </a:prstGeom>
-          <a:solidFill>
-            <a:srgbClr val="12151C"/>
-          </a:solidFill>
-          <a:ln>
-            <a:noFill/>
-          </a:ln>
-        </p:spPr>
-        <p:txBody>
-          <a:bodyPr rtlCol="0" anchor="ctr"/>
-          <a:lstStyle/>
-          <a:p>
-            <a:pPr algn="ctr"/>
-          </a:p>
-        </p:txBody>
-      </p:sp>
-      <p:sp>
-        <p:nvSpPr>
-          <p:cNvPr id="12" name="Oval 11"/>
-          <p:cNvSpPr/>
-          <p:nvPr/>
-        </p:nvSpPr>
-        <p:spPr>
-          <a:xfrm>
-            <a:off x="2847600" y="435600"/>
-            <a:ext cx="36000" cy="36000"/>
-          </a:xfrm>
-          <a:prstGeom prst="ellipse">
-            <a:avLst/>
-          </a:prstGeom>
-          <a:solidFill>
-            <a:srgbClr val="82D5FF"/>
-          </a:solidFill>
-          <a:ln>
-            <a:noFill/>
-          </a:ln>
-        </p:spPr>
-        <p:txBody>
-          <a:bodyPr rtlCol="0" anchor="ctr"/>
-          <a:lstStyle/>
-          <a:p>
-            <a:pPr algn="ctr"/>
-          </a:p>
-        </p:txBody>
-      </p:sp>
-      <p:sp>
-        <p:nvSpPr>
-          <p:cNvPr id="13" name="Oval 12"/>
-          <p:cNvSpPr/>
-          <p:nvPr/>
-        </p:nvSpPr>
-        <p:spPr>
-          <a:xfrm>
-            <a:off x="2847600" y="536400"/>
-            <a:ext cx="36000" cy="36000"/>
-          </a:xfrm>
-          <a:prstGeom prst="ellipse">
-            <a:avLst/>
-          </a:prstGeom>
-          <a:solidFill>
-            <a:srgbClr val="82D5FF"/>
-          </a:solidFill>
-          <a:ln>
-            <a:noFill/>
-          </a:ln>
-        </p:spPr>
-        <p:txBody>
-          <a:bodyPr rtlCol="0" anchor="ctr"/>
-          <a:lstStyle/>
-          <a:p>
-            <a:pPr algn="ctr"/>
-          </a:p>
-        </p:txBody>
-      </p:sp>
-      <p:sp>
-        <p:nvSpPr>
-          <p:cNvPr id="14" name="Oval 13"/>
-          <p:cNvSpPr/>
-          <p:nvPr/>
-        </p:nvSpPr>
-        <p:spPr>
-          <a:xfrm>
-            <a:off x="2948400" y="234000"/>
-            <a:ext cx="36000" cy="36000"/>
-          </a:xfrm>
-          <a:prstGeom prst="ellipse">
-            <a:avLst/>
-          </a:prstGeom>
-          <a:solidFill>
-            <a:srgbClr val="12151C"/>
-          </a:solidFill>
-          <a:ln>
-            <a:noFill/>
-          </a:ln>
-        </p:spPr>
-        <p:txBody>
-          <a:bodyPr rtlCol="0" anchor="ctr"/>
-          <a:lstStyle/>
-          <a:p>
-            <a:pPr algn="ctr"/>
-          </a:p>
-        </p:txBody>
-      </p:sp>
-      <p:sp>
-        <p:nvSpPr>
-          <p:cNvPr id="15" name="Oval 14"/>
-          <p:cNvSpPr/>
-          <p:nvPr/>
-        </p:nvSpPr>
-        <p:spPr>
-          <a:xfrm>
-            <a:off x="2948400" y="334800"/>
-            <a:ext cx="36000" cy="36000"/>
-          </a:xfrm>
-          <a:prstGeom prst="ellipse">
-            <a:avLst/>
-          </a:prstGeom>
-          <a:solidFill>
-            <a:srgbClr val="82D5FF"/>
-          </a:solidFill>
-          <a:ln>
-            <a:noFill/>
-          </a:ln>
-        </p:spPr>
-        <p:txBody>
-          <a:bodyPr rtlCol="0" anchor="ctr"/>
-          <a:lstStyle/>
-          <a:p>
-            <a:pPr algn="ctr"/>
-          </a:p>
-        </p:txBody>
-      </p:sp>
-      <p:sp>
-        <p:nvSpPr>
-          <p:cNvPr id="16" name="Oval 15"/>
-          <p:cNvSpPr/>
-          <p:nvPr/>
-        </p:nvSpPr>
-        <p:spPr>
-          <a:xfrm>
-            <a:off x="2948400" y="435600"/>
-            <a:ext cx="36000" cy="36000"/>
-          </a:xfrm>
-          <a:prstGeom prst="ellipse">
-            <a:avLst/>
-          </a:prstGeom>
-          <a:solidFill>
-            <a:srgbClr val="82D5FF"/>
-          </a:solidFill>
-          <a:ln>
-            <a:noFill/>
-          </a:ln>
-        </p:spPr>
-        <p:txBody>
-          <a:bodyPr rtlCol="0" anchor="ctr"/>
-          <a:lstStyle/>
-          <a:p>
-            <a:pPr algn="ctr"/>
-          </a:p>
-        </p:txBody>
-      </p:sp>
-      <p:sp>
-        <p:nvSpPr>
-          <p:cNvPr id="17" name="Oval 16"/>
-          <p:cNvSpPr/>
-          <p:nvPr/>
-        </p:nvSpPr>
-        <p:spPr>
-          <a:xfrm>
-            <a:off x="2948400" y="536400"/>
-            <a:ext cx="36000" cy="36000"/>
-          </a:xfrm>
-          <a:prstGeom prst="ellipse">
-            <a:avLst/>
-          </a:prstGeom>
-          <a:solidFill>
-            <a:srgbClr val="12151C"/>
-          </a:solidFill>
-          <a:ln>
-            <a:noFill/>
-          </a:ln>
-        </p:spPr>
-        <p:txBody>
-          <a:bodyPr rtlCol="0" anchor="ctr"/>
-          <a:lstStyle/>
-          <a:p>
-            <a:pPr algn="ctr"/>
-          </a:p>
-        </p:txBody>
-      </p:sp>
-      <p:sp>
-        <p:nvSpPr>
-          <p:cNvPr id="18" name="Oval 17"/>
-          <p:cNvSpPr/>
-          <p:nvPr/>
-        </p:nvSpPr>
-        <p:spPr>
-          <a:xfrm>
-            <a:off x="3049200" y="234000"/>
-            <a:ext cx="36000" cy="36000"/>
-          </a:xfrm>
-          <a:prstGeom prst="ellipse">
-            <a:avLst/>
-          </a:prstGeom>
-          <a:solidFill>
-            <a:srgbClr val="82D5FF"/>
-          </a:solidFill>
-          <a:ln>
-            <a:noFill/>
-          </a:ln>
-        </p:spPr>
-        <p:txBody>
-          <a:bodyPr rtlCol="0" anchor="ctr"/>
-          <a:lstStyle/>
-          <a:p>
-            <a:pPr algn="ctr"/>
-          </a:p>
-        </p:txBody>
-      </p:sp>
-      <p:sp>
-        <p:nvSpPr>
-          <p:cNvPr id="19" name="Oval 18"/>
-          <p:cNvSpPr/>
-          <p:nvPr/>
-        </p:nvSpPr>
-        <p:spPr>
-          <a:xfrm>
-            <a:off x="3049200" y="334800"/>
-            <a:ext cx="36000" cy="36000"/>
-          </a:xfrm>
-          <a:prstGeom prst="ellipse">
-            <a:avLst/>
-          </a:prstGeom>
-          <a:solidFill>
-            <a:srgbClr val="82D5FF"/>
-          </a:solidFill>
-          <a:ln>
-            <a:noFill/>
-          </a:ln>
-        </p:spPr>
-        <p:txBody>
-          <a:bodyPr rtlCol="0" anchor="ctr"/>
-          <a:lstStyle/>
-          <a:p>
-            <a:pPr algn="ctr"/>
-          </a:p>
-        </p:txBody>
-      </p:sp>
-      <p:sp>
-        <p:nvSpPr>
-          <p:cNvPr id="20" name="Oval 19"/>
-          <p:cNvSpPr/>
-          <p:nvPr/>
-        </p:nvSpPr>
-        <p:spPr>
-          <a:xfrm>
-            <a:off x="3049200" y="435600"/>
-            <a:ext cx="36000" cy="36000"/>
-          </a:xfrm>
-          <a:prstGeom prst="ellipse">
-            <a:avLst/>
-          </a:prstGeom>
-          <a:solidFill>
-            <a:srgbClr val="12151C"/>
-          </a:solidFill>
-          <a:ln>
-            <a:noFill/>
-          </a:ln>
-        </p:spPr>
-        <p:txBody>
-          <a:bodyPr rtlCol="0" anchor="ctr"/>
-          <a:lstStyle/>
-          <a:p>
-            <a:pPr algn="ctr"/>
-          </a:p>
-        </p:txBody>
-      </p:sp>
-      <p:sp>
-        <p:nvSpPr>
-          <p:cNvPr id="21" name="Oval 20"/>
-          <p:cNvSpPr/>
-          <p:nvPr/>
-        </p:nvSpPr>
-        <p:spPr>
-          <a:xfrm>
-            <a:off x="3049200" y="536400"/>
-            <a:ext cx="36000" cy="36000"/>
-          </a:xfrm>
-          <a:prstGeom prst="ellipse">
-            <a:avLst/>
-          </a:prstGeom>
-          <a:solidFill>
-            <a:srgbClr val="82D5FF"/>
-          </a:solidFill>
-          <a:ln>
-            <a:noFill/>
-          </a:ln>
-        </p:spPr>
-        <p:txBody>
-          <a:bodyPr rtlCol="0" anchor="ctr"/>
-          <a:lstStyle/>
-          <a:p>
-            <a:pPr algn="ctr"/>
-          </a:p>
-        </p:txBody>
-      </p:sp>
-      <p:sp>
-        <p:nvSpPr>
-          <p:cNvPr id="22" name="텍스트"/>
+          <p:cNvPr id="4" name="텍스트"/>
           <p:cNvSpPr txBox="1"/>
           <p:nvPr/>
         </p:nvSpPr>
         <p:spPr>
           <a:xfrm>
-            <a:off x="252000" y="223200"/>
-            <a:ext cx="1440000" cy="133351"/>
+            <a:off x="252000" y="252000"/>
+            <a:ext cx="1512000" cy="123826"/>
           </a:xfrm>
           <a:prstGeom prst="rect">
             <a:avLst/>
@@ -3701,11 +3179,11 @@
           <a:p>
             <a:pPr algn="l">
               <a:lnSpc>
-                <a:spcPts val="1015"/>
+                <a:spcPts val="942"/>
               </a:lnSpc>
             </a:pPr>
             <a:r>
-              <a:rPr sz="700" b="1" spc="200">
+              <a:rPr sz="650" b="1" spc="220">
                 <a:solidFill>
                   <a:srgbClr val="1F3B4E"/>
                 </a:solidFill>
@@ -3719,14 +3197,14 @@
       </p:sp>
       <p:sp>
         <p:nvSpPr>
-          <p:cNvPr id="23" name="텍스트"/>
+          <p:cNvPr id="5" name="텍스트"/>
           <p:cNvSpPr txBox="1"/>
           <p:nvPr/>
         </p:nvSpPr>
         <p:spPr>
           <a:xfrm>
-            <a:off x="252000" y="770400"/>
-            <a:ext cx="2016000" cy="360000"/>
+            <a:off x="252000" y="576000"/>
+            <a:ext cx="1800000" cy="237600"/>
           </a:xfrm>
           <a:prstGeom prst="rect">
             <a:avLst/>
@@ -3741,11 +3219,11 @@
           <a:p>
             <a:pPr algn="l">
               <a:lnSpc>
-                <a:spcPts val="3190"/>
+                <a:spcPts val="1957"/>
               </a:lnSpc>
             </a:pPr>
             <a:r>
-              <a:rPr sz="2200" b="1">
+              <a:rPr sz="1350" b="1" spc="120">
                 <a:solidFill>
                   <a:srgbClr val="12151C"/>
                 </a:solidFill>
@@ -3759,14 +3237,14 @@
       </p:sp>
       <p:sp>
         <p:nvSpPr>
-          <p:cNvPr id="24" name="텍스트"/>
+          <p:cNvPr id="6" name="텍스트"/>
           <p:cNvSpPr txBox="1"/>
           <p:nvPr/>
         </p:nvSpPr>
         <p:spPr>
           <a:xfrm>
-            <a:off x="252000" y="1173600"/>
-            <a:ext cx="2016000" cy="171451"/>
+            <a:off x="252000" y="828000"/>
+            <a:ext cx="1800000" cy="133351"/>
           </a:xfrm>
           <a:prstGeom prst="rect">
             <a:avLst/>
@@ -3781,11 +3259,11 @@
           <a:p>
             <a:pPr algn="l">
               <a:lnSpc>
-                <a:spcPts val="1305"/>
+                <a:spcPts val="1015"/>
               </a:lnSpc>
             </a:pPr>
             <a:r>
-              <a:rPr sz="900" b="0">
+              <a:rPr sz="700" b="0" spc="60">
                 <a:solidFill>
                   <a:srgbClr val="1F3B4E"/>
                 </a:solidFill>
@@ -3799,14 +3277,14 @@
       </p:sp>
       <p:sp>
         <p:nvSpPr>
-          <p:cNvPr id="25" name="텍스트"/>
+          <p:cNvPr id="7" name="텍스트"/>
           <p:cNvSpPr txBox="1"/>
           <p:nvPr/>
         </p:nvSpPr>
         <p:spPr>
           <a:xfrm>
-            <a:off x="1620000" y="1339200"/>
-            <a:ext cx="1368000" cy="133351"/>
+            <a:off x="252000" y="1411200"/>
+            <a:ext cx="900000" cy="91441"/>
           </a:xfrm>
           <a:prstGeom prst="rect">
             <a:avLst/>
@@ -3819,13 +3297,53 @@
           </a:bodyPr>
           <a:lstStyle/>
           <a:p>
-            <a:pPr algn="r">
+            <a:pPr algn="l">
               <a:lnSpc>
-                <a:spcPts val="1015"/>
+                <a:spcPts val="696"/>
               </a:lnSpc>
             </a:pPr>
             <a:r>
-              <a:rPr sz="700" b="0">
+              <a:rPr sz="480" b="1" spc="140">
+                <a:solidFill>
+                  <a:srgbClr val="1F3B4E"/>
+                </a:solidFill>
+                <a:latin typeface="맑은 고딕"/>
+                <a:ea typeface="맑은 고딕"/>
+              </a:rPr>
+              <a:t>TEL</a:t>
+            </a:r>
+          </a:p>
+        </p:txBody>
+      </p:sp>
+      <p:sp>
+        <p:nvSpPr>
+          <p:cNvPr id="8" name="텍스트"/>
+          <p:cNvSpPr txBox="1"/>
+          <p:nvPr/>
+        </p:nvSpPr>
+        <p:spPr>
+          <a:xfrm>
+            <a:off x="252000" y="1512000"/>
+            <a:ext cx="900000" cy="120016"/>
+          </a:xfrm>
+          <a:prstGeom prst="rect">
+            <a:avLst/>
+          </a:prstGeom>
+          <a:noFill/>
+        </p:spPr>
+        <p:txBody>
+          <a:bodyPr wrap="square" lIns="0" rIns="0" tIns="0" bIns="0" anchor="t">
+            <a:spAutoFit/>
+          </a:bodyPr>
+          <a:lstStyle/>
+          <a:p>
+            <a:pPr algn="l">
+              <a:lnSpc>
+                <a:spcPts val="913"/>
+              </a:lnSpc>
+            </a:pPr>
+            <a:r>
+              <a:rPr sz="630" b="0">
                 <a:solidFill>
                   <a:srgbClr val="12151C"/>
                 </a:solidFill>
@@ -3837,16 +3355,37 @@
           </a:p>
         </p:txBody>
       </p:sp>
-      <p:sp>
-        <p:nvSpPr>
-          <p:cNvPr id="26" name="텍스트"/>
+      <p:cxnSp>
+        <p:nvCxnSpPr>
+          <p:cNvPr id="9" name="Connector 8"/>
+          <p:cNvCxnSpPr/>
+          <p:nvPr/>
+        </p:nvCxnSpPr>
+        <p:spPr>
+          <a:xfrm>
+            <a:off x="1072800" y="1411200"/>
+            <a:ext cx="0" cy="201600"/>
+          </a:xfrm>
+          <a:prstGeom prst="line">
+            <a:avLst/>
+          </a:prstGeom>
+          <a:ln w="3600">
+            <a:solidFill>
+              <a:srgbClr val="1F3B4E"/>
+            </a:solidFill>
+          </a:ln>
+        </p:spPr>
+      </p:cxnSp>
+      <p:sp>
+        <p:nvSpPr>
+          <p:cNvPr id="10" name="텍스트"/>
           <p:cNvSpPr txBox="1"/>
           <p:nvPr/>
         </p:nvSpPr>
         <p:spPr>
           <a:xfrm>
-            <a:off x="1620000" y="1476000"/>
-            <a:ext cx="1368000" cy="133351"/>
+            <a:off x="1152000" y="1411200"/>
+            <a:ext cx="1008000" cy="91441"/>
           </a:xfrm>
           <a:prstGeom prst="rect">
             <a:avLst/>
@@ -3859,13 +3398,53 @@
           </a:bodyPr>
           <a:lstStyle/>
           <a:p>
-            <a:pPr algn="r">
+            <a:pPr algn="l">
               <a:lnSpc>
-                <a:spcPts val="1015"/>
+                <a:spcPts val="696"/>
               </a:lnSpc>
             </a:pPr>
             <a:r>
-              <a:rPr sz="700" b="0">
+              <a:rPr sz="480" b="1" spc="140">
+                <a:solidFill>
+                  <a:srgbClr val="1F3B4E"/>
+                </a:solidFill>
+                <a:latin typeface="맑은 고딕"/>
+                <a:ea typeface="맑은 고딕"/>
+              </a:rPr>
+              <a:t>MAIL</a:t>
+            </a:r>
+          </a:p>
+        </p:txBody>
+      </p:sp>
+      <p:sp>
+        <p:nvSpPr>
+          <p:cNvPr id="11" name="텍스트"/>
+          <p:cNvSpPr txBox="1"/>
+          <p:nvPr/>
+        </p:nvSpPr>
+        <p:spPr>
+          <a:xfrm>
+            <a:off x="1152000" y="1512000"/>
+            <a:ext cx="1008000" cy="120016"/>
+          </a:xfrm>
+          <a:prstGeom prst="rect">
+            <a:avLst/>
+          </a:prstGeom>
+          <a:noFill/>
+        </p:spPr>
+        <p:txBody>
+          <a:bodyPr wrap="square" lIns="0" rIns="0" tIns="0" bIns="0" anchor="t">
+            <a:spAutoFit/>
+          </a:bodyPr>
+          <a:lstStyle/>
+          <a:p>
+            <a:pPr algn="l">
+              <a:lnSpc>
+                <a:spcPts val="913"/>
+              </a:lnSpc>
+            </a:pPr>
+            <a:r>
+              <a:rPr sz="630" b="0">
                 <a:solidFill>
                   <a:srgbClr val="12151C"/>
                 </a:solidFill>
@@ -3877,16 +3456,37 @@
           </a:p>
         </p:txBody>
       </p:sp>
-      <p:sp>
-        <p:nvSpPr>
-          <p:cNvPr id="27" name="텍스트"/>
+      <p:cxnSp>
+        <p:nvCxnSpPr>
+          <p:cNvPr id="12" name="Connector 11"/>
+          <p:cNvCxnSpPr/>
+          <p:nvPr/>
+        </p:nvCxnSpPr>
+        <p:spPr>
+          <a:xfrm>
+            <a:off x="2080800" y="1411200"/>
+            <a:ext cx="0" cy="201600"/>
+          </a:xfrm>
+          <a:prstGeom prst="line">
+            <a:avLst/>
+          </a:prstGeom>
+          <a:ln w="3600">
+            <a:solidFill>
+              <a:srgbClr val="1F3B4E"/>
+            </a:solidFill>
+          </a:ln>
+        </p:spPr>
+      </p:cxnSp>
+      <p:sp>
+        <p:nvSpPr>
+          <p:cNvPr id="13" name="텍스트"/>
           <p:cNvSpPr txBox="1"/>
           <p:nvPr/>
         </p:nvSpPr>
         <p:spPr>
           <a:xfrm>
-            <a:off x="1620000" y="1612800"/>
-            <a:ext cx="1368000" cy="133351"/>
+            <a:off x="2160000" y="1411200"/>
+            <a:ext cx="972000" cy="91441"/>
           </a:xfrm>
           <a:prstGeom prst="rect">
             <a:avLst/>
@@ -3899,13 +3499,53 @@
           </a:bodyPr>
           <a:lstStyle/>
           <a:p>
-            <a:pPr algn="r">
+            <a:pPr algn="l">
               <a:lnSpc>
-                <a:spcPts val="1015"/>
+                <a:spcPts val="696"/>
               </a:lnSpc>
             </a:pPr>
             <a:r>
-              <a:rPr sz="700" b="0">
+              <a:rPr sz="480" b="1" spc="140">
+                <a:solidFill>
+                  <a:srgbClr val="1F3B4E"/>
+                </a:solidFill>
+                <a:latin typeface="맑은 고딕"/>
+                <a:ea typeface="맑은 고딕"/>
+              </a:rPr>
+              <a:t>ADDR</a:t>
+            </a:r>
+          </a:p>
+        </p:txBody>
+      </p:sp>
+      <p:sp>
+        <p:nvSpPr>
+          <p:cNvPr id="14" name="텍스트"/>
+          <p:cNvSpPr txBox="1"/>
+          <p:nvPr/>
+        </p:nvSpPr>
+        <p:spPr>
+          <a:xfrm>
+            <a:off x="2160000" y="1512000"/>
+            <a:ext cx="972000" cy="120016"/>
+          </a:xfrm>
+          <a:prstGeom prst="rect">
+            <a:avLst/>
+          </a:prstGeom>
+          <a:noFill/>
+        </p:spPr>
+        <p:txBody>
+          <a:bodyPr wrap="square" lIns="0" rIns="0" tIns="0" bIns="0" anchor="t">
+            <a:spAutoFit/>
+          </a:bodyPr>
+          <a:lstStyle/>
+          <a:p>
+            <a:pPr algn="l">
+              <a:lnSpc>
+                <a:spcPts val="913"/>
+              </a:lnSpc>
+            </a:pPr>
+            <a:r>
+              <a:rPr sz="630" b="0">
                 <a:solidFill>
                   <a:srgbClr val="12151C"/>
                 </a:solidFill>
@@ -3943,18 +3583,226 @@
         <p:nvPr/>
       </p:nvGrpSpPr>
       <p:grpSpPr/>
-      <p:sp>
-        <p:nvSpPr>
-          <p:cNvPr id="2" name="Oval 1"/>
+      <p:cxnSp>
+        <p:nvCxnSpPr>
+          <p:cNvPr id="2" name="Connector 1"/>
+          <p:cNvCxnSpPr/>
+          <p:nvPr/>
+        </p:nvCxnSpPr>
+        <p:spPr>
+          <a:xfrm>
+            <a:off x="93600" y="122400"/>
+            <a:ext cx="57600" cy="0"/>
+          </a:xfrm>
+          <a:prstGeom prst="line">
+            <a:avLst/>
+          </a:prstGeom>
+          <a:ln w="3600">
+            <a:solidFill>
+              <a:srgbClr val="1F3B4E"/>
+            </a:solidFill>
+          </a:ln>
+        </p:spPr>
+      </p:cxnSp>
+      <p:cxnSp>
+        <p:nvCxnSpPr>
+          <p:cNvPr id="3" name="Connector 2"/>
+          <p:cNvCxnSpPr/>
+          <p:nvPr/>
+        </p:nvCxnSpPr>
+        <p:spPr>
+          <a:xfrm>
+            <a:off x="122400" y="93600"/>
+            <a:ext cx="0" cy="57600"/>
+          </a:xfrm>
+          <a:prstGeom prst="line">
+            <a:avLst/>
+          </a:prstGeom>
+          <a:ln w="3600">
+            <a:solidFill>
+              <a:srgbClr val="1F3B4E"/>
+            </a:solidFill>
+          </a:ln>
+        </p:spPr>
+      </p:cxnSp>
+      <p:cxnSp>
+        <p:nvCxnSpPr>
+          <p:cNvPr id="4" name="Connector 3"/>
+          <p:cNvCxnSpPr/>
+          <p:nvPr/>
+        </p:nvCxnSpPr>
+        <p:spPr>
+          <a:xfrm>
+            <a:off x="3088800" y="122400"/>
+            <a:ext cx="57600" cy="0"/>
+          </a:xfrm>
+          <a:prstGeom prst="line">
+            <a:avLst/>
+          </a:prstGeom>
+          <a:ln w="3600">
+            <a:solidFill>
+              <a:srgbClr val="1F3B4E"/>
+            </a:solidFill>
+          </a:ln>
+        </p:spPr>
+      </p:cxnSp>
+      <p:cxnSp>
+        <p:nvCxnSpPr>
+          <p:cNvPr id="5" name="Connector 4"/>
+          <p:cNvCxnSpPr/>
+          <p:nvPr/>
+        </p:nvCxnSpPr>
+        <p:spPr>
+          <a:xfrm>
+            <a:off x="3117600" y="93600"/>
+            <a:ext cx="0" cy="57600"/>
+          </a:xfrm>
+          <a:prstGeom prst="line">
+            <a:avLst/>
+          </a:prstGeom>
+          <a:ln w="3600">
+            <a:solidFill>
+              <a:srgbClr val="1F3B4E"/>
+            </a:solidFill>
+          </a:ln>
+        </p:spPr>
+      </p:cxnSp>
+      <p:cxnSp>
+        <p:nvCxnSpPr>
+          <p:cNvPr id="6" name="Connector 5"/>
+          <p:cNvCxnSpPr/>
+          <p:nvPr/>
+        </p:nvCxnSpPr>
+        <p:spPr>
+          <a:xfrm>
+            <a:off x="93600" y="1677600"/>
+            <a:ext cx="57600" cy="0"/>
+          </a:xfrm>
+          <a:prstGeom prst="line">
+            <a:avLst/>
+          </a:prstGeom>
+          <a:ln w="3600">
+            <a:solidFill>
+              <a:srgbClr val="1F3B4E"/>
+            </a:solidFill>
+          </a:ln>
+        </p:spPr>
+      </p:cxnSp>
+      <p:cxnSp>
+        <p:nvCxnSpPr>
+          <p:cNvPr id="7" name="Connector 6"/>
+          <p:cNvCxnSpPr/>
+          <p:nvPr/>
+        </p:nvCxnSpPr>
+        <p:spPr>
+          <a:xfrm>
+            <a:off x="122400" y="1648800"/>
+            <a:ext cx="0" cy="57600"/>
+          </a:xfrm>
+          <a:prstGeom prst="line">
+            <a:avLst/>
+          </a:prstGeom>
+          <a:ln w="3600">
+            <a:solidFill>
+              <a:srgbClr val="1F3B4E"/>
+            </a:solidFill>
+          </a:ln>
+        </p:spPr>
+      </p:cxnSp>
+      <p:cxnSp>
+        <p:nvCxnSpPr>
+          <p:cNvPr id="8" name="Connector 7"/>
+          <p:cNvCxnSpPr/>
+          <p:nvPr/>
+        </p:nvCxnSpPr>
+        <p:spPr>
+          <a:xfrm>
+            <a:off x="3088800" y="1677600"/>
+            <a:ext cx="57600" cy="0"/>
+          </a:xfrm>
+          <a:prstGeom prst="line">
+            <a:avLst/>
+          </a:prstGeom>
+          <a:ln w="3600">
+            <a:solidFill>
+              <a:srgbClr val="1F3B4E"/>
+            </a:solidFill>
+          </a:ln>
+        </p:spPr>
+      </p:cxnSp>
+      <p:cxnSp>
+        <p:nvCxnSpPr>
+          <p:cNvPr id="9" name="Connector 8"/>
+          <p:cNvCxnSpPr/>
+          <p:nvPr/>
+        </p:nvCxnSpPr>
+        <p:spPr>
+          <a:xfrm>
+            <a:off x="3117600" y="1648800"/>
+            <a:ext cx="0" cy="57600"/>
+          </a:xfrm>
+          <a:prstGeom prst="line">
+            <a:avLst/>
+          </a:prstGeom>
+          <a:ln w="3600">
+            <a:solidFill>
+              <a:srgbClr val="1F3B4E"/>
+            </a:solidFill>
+          </a:ln>
+        </p:spPr>
+      </p:cxnSp>
+      <p:sp>
+        <p:nvSpPr>
+          <p:cNvPr id="10" name="텍스트"/>
+          <p:cNvSpPr txBox="1"/>
+          <p:nvPr/>
+        </p:nvSpPr>
+        <p:spPr>
+          <a:xfrm>
+            <a:off x="360000" y="331200"/>
+            <a:ext cx="2520000" cy="99061"/>
+          </a:xfrm>
+          <a:prstGeom prst="rect">
+            <a:avLst/>
+          </a:prstGeom>
+          <a:noFill/>
+        </p:spPr>
+        <p:txBody>
+          <a:bodyPr wrap="square" lIns="0" rIns="0" tIns="0" bIns="0" anchor="t">
+            <a:spAutoFit/>
+          </a:bodyPr>
+          <a:lstStyle/>
+          <a:p>
+            <a:pPr algn="ctr">
+              <a:lnSpc>
+                <a:spcPts val="754"/>
+              </a:lnSpc>
+            </a:pPr>
+            <a:r>
+              <a:rPr sz="520" b="1" spc="240">
+                <a:solidFill>
+                  <a:srgbClr val="1F3B4E"/>
+                </a:solidFill>
+                <a:latin typeface="맑은 고딕"/>
+                <a:ea typeface="맑은 고딕"/>
+              </a:rPr>
+              <a:t>수업 안내</a:t>
+            </a:r>
+          </a:p>
+        </p:txBody>
+      </p:sp>
+      <p:sp>
+        <p:nvSpPr>
+          <p:cNvPr id="11" name="Rectangle 10"/>
           <p:cNvSpPr/>
           <p:nvPr/>
         </p:nvSpPr>
         <p:spPr>
           <a:xfrm>
-            <a:off x="1591200" y="511200"/>
-            <a:ext cx="57600" cy="57600"/>
-          </a:xfrm>
-          <a:prstGeom prst="ellipse">
+            <a:off x="1530000" y="453600"/>
+            <a:ext cx="180000" cy="14400"/>
+          </a:xfrm>
+          <a:prstGeom prst="rect">
             <a:avLst/>
           </a:prstGeom>
           <a:solidFill>
@@ -3974,14 +3822,14 @@
       </p:sp>
       <p:sp>
         <p:nvSpPr>
-          <p:cNvPr id="3" name="텍스트"/>
+          <p:cNvPr id="12" name="텍스트"/>
           <p:cNvSpPr txBox="1"/>
           <p:nvPr/>
         </p:nvSpPr>
         <p:spPr>
           <a:xfrm>
-            <a:off x="396000" y="684000"/>
-            <a:ext cx="2448000" cy="504000"/>
+            <a:off x="360000" y="684000"/>
+            <a:ext cx="840000" cy="216000"/>
           </a:xfrm>
           <a:prstGeom prst="rect">
             <a:avLst/>
@@ -3989,38 +3837,261 @@
           <a:noFill/>
         </p:spPr>
         <p:txBody>
-          <a:bodyPr wrap="square" lIns="0" rIns="0" tIns="0" bIns="0" anchor="t">
+          <a:bodyPr wrap="square" lIns="0" rIns="0" tIns="0" bIns="0" anchor="ctr">
             <a:spAutoFit/>
           </a:bodyPr>
           <a:lstStyle/>
           <a:p>
             <a:pPr algn="ctr">
               <a:lnSpc>
-                <a:spcPts val="1739"/>
+                <a:spcPts val="1015"/>
               </a:lnSpc>
             </a:pPr>
             <a:r>
-              <a:rPr sz="1200" b="1">
+              <a:rPr sz="700" b="1">
                 <a:solidFill>
                   <a:srgbClr val="12151C"/>
                 </a:solidFill>
                 <a:latin typeface="맑은 고딕"/>
                 <a:ea typeface="맑은 고딕"/>
               </a:rPr>
-              <a:t>각자의 속도를 존중합니다</a:t>
-            </a:r>
-          </a:p>
-        </p:txBody>
-      </p:sp>
-      <p:sp>
-        <p:nvSpPr>
-          <p:cNvPr id="4" name="텍스트"/>
+              <a:t>미술</a:t>
+            </a:r>
+          </a:p>
+        </p:txBody>
+      </p:sp>
+      <p:sp>
+        <p:nvSpPr>
+          <p:cNvPr id="13" name="텍스트"/>
           <p:cNvSpPr txBox="1"/>
           <p:nvPr/>
         </p:nvSpPr>
         <p:spPr>
           <a:xfrm>
-            <a:off x="360000" y="1339200"/>
+            <a:off x="1200000" y="684000"/>
+            <a:ext cx="840000" cy="216000"/>
+          </a:xfrm>
+          <a:prstGeom prst="rect">
+            <a:avLst/>
+          </a:prstGeom>
+          <a:noFill/>
+        </p:spPr>
+        <p:txBody>
+          <a:bodyPr wrap="square" lIns="0" rIns="0" tIns="0" bIns="0" anchor="ctr">
+            <a:spAutoFit/>
+          </a:bodyPr>
+          <a:lstStyle/>
+          <a:p>
+            <a:pPr algn="ctr">
+              <a:lnSpc>
+                <a:spcPts val="1015"/>
+              </a:lnSpc>
+            </a:pPr>
+            <a:r>
+              <a:rPr sz="700" b="1">
+                <a:solidFill>
+                  <a:srgbClr val="12151C"/>
+                </a:solidFill>
+                <a:latin typeface="맑은 고딕"/>
+                <a:ea typeface="맑은 고딕"/>
+              </a:rPr>
+              <a:t>논술</a:t>
+            </a:r>
+          </a:p>
+        </p:txBody>
+      </p:sp>
+      <p:cxnSp>
+        <p:nvCxnSpPr>
+          <p:cNvPr id="14" name="Connector 13"/>
+          <p:cNvCxnSpPr/>
+          <p:nvPr/>
+        </p:nvCxnSpPr>
+        <p:spPr>
+          <a:xfrm>
+            <a:off x="1200000" y="676800"/>
+            <a:ext cx="0" cy="230400"/>
+          </a:xfrm>
+          <a:prstGeom prst="line">
+            <a:avLst/>
+          </a:prstGeom>
+          <a:ln w="3600">
+            <a:solidFill>
+              <a:srgbClr val="357DA4"/>
+            </a:solidFill>
+          </a:ln>
+        </p:spPr>
+      </p:cxnSp>
+      <p:sp>
+        <p:nvSpPr>
+          <p:cNvPr id="15" name="텍스트"/>
+          <p:cNvSpPr txBox="1"/>
+          <p:nvPr/>
+        </p:nvSpPr>
+        <p:spPr>
+          <a:xfrm>
+            <a:off x="2040000" y="684000"/>
+            <a:ext cx="840000" cy="216000"/>
+          </a:xfrm>
+          <a:prstGeom prst="rect">
+            <a:avLst/>
+          </a:prstGeom>
+          <a:noFill/>
+        </p:spPr>
+        <p:txBody>
+          <a:bodyPr wrap="square" lIns="0" rIns="0" tIns="0" bIns="0" anchor="ctr">
+            <a:spAutoFit/>
+          </a:bodyPr>
+          <a:lstStyle/>
+          <a:p>
+            <a:pPr algn="ctr">
+              <a:lnSpc>
+                <a:spcPts val="1015"/>
+              </a:lnSpc>
+            </a:pPr>
+            <a:r>
+              <a:rPr sz="700" b="1">
+                <a:solidFill>
+                  <a:srgbClr val="12151C"/>
+                </a:solidFill>
+                <a:latin typeface="맑은 고딕"/>
+                <a:ea typeface="맑은 고딕"/>
+              </a:rPr>
+              <a:t>방과후 수업</a:t>
+            </a:r>
+          </a:p>
+        </p:txBody>
+      </p:sp>
+      <p:cxnSp>
+        <p:nvCxnSpPr>
+          <p:cNvPr id="16" name="Connector 15"/>
+          <p:cNvCxnSpPr/>
+          <p:nvPr/>
+        </p:nvCxnSpPr>
+        <p:spPr>
+          <a:xfrm>
+            <a:off x="2040000" y="676800"/>
+            <a:ext cx="0" cy="230400"/>
+          </a:xfrm>
+          <a:prstGeom prst="line">
+            <a:avLst/>
+          </a:prstGeom>
+          <a:ln w="3600">
+            <a:solidFill>
+              <a:srgbClr val="357DA4"/>
+            </a:solidFill>
+          </a:ln>
+        </p:spPr>
+      </p:cxnSp>
+      <p:cxnSp>
+        <p:nvCxnSpPr>
+          <p:cNvPr id="17" name="Connector 16"/>
+          <p:cNvCxnSpPr/>
+          <p:nvPr/>
+        </p:nvCxnSpPr>
+        <p:spPr>
+          <a:xfrm>
+            <a:off x="360000" y="1159200"/>
+            <a:ext cx="2520000" cy="0"/>
+          </a:xfrm>
+          <a:prstGeom prst="line">
+            <a:avLst/>
+          </a:prstGeom>
+          <a:ln w="3600">
+            <a:solidFill>
+              <a:srgbClr val="357DA4"/>
+            </a:solidFill>
+          </a:ln>
+        </p:spPr>
+      </p:cxnSp>
+      <p:sp>
+        <p:nvSpPr>
+          <p:cNvPr id="18" name="텍스트"/>
+          <p:cNvSpPr txBox="1"/>
+          <p:nvPr/>
+        </p:nvSpPr>
+        <p:spPr>
+          <a:xfrm>
+            <a:off x="360000" y="1245600"/>
+            <a:ext cx="1224000" cy="118111"/>
+          </a:xfrm>
+          <a:prstGeom prst="rect">
+            <a:avLst/>
+          </a:prstGeom>
+          <a:noFill/>
+        </p:spPr>
+        <p:txBody>
+          <a:bodyPr wrap="square" lIns="0" rIns="0" tIns="0" bIns="0" anchor="t">
+            <a:spAutoFit/>
+          </a:bodyPr>
+          <a:lstStyle/>
+          <a:p>
+            <a:pPr algn="ctr">
+              <a:lnSpc>
+                <a:spcPts val="899"/>
+              </a:lnSpc>
+            </a:pPr>
+            <a:r>
+              <a:rPr sz="620" b="0">
+                <a:solidFill>
+                  <a:srgbClr val="12151C"/>
+                </a:solidFill>
+                <a:latin typeface="맑은 고딕"/>
+                <a:ea typeface="맑은 고딕"/>
+              </a:rPr>
+              <a:t>평일 09:00 – 17:00</a:t>
+            </a:r>
+          </a:p>
+        </p:txBody>
+      </p:sp>
+      <p:sp>
+        <p:nvSpPr>
+          <p:cNvPr id="19" name="텍스트"/>
+          <p:cNvSpPr txBox="1"/>
+          <p:nvPr/>
+        </p:nvSpPr>
+        <p:spPr>
+          <a:xfrm>
+            <a:off x="1656000" y="1245600"/>
+            <a:ext cx="1224000" cy="118111"/>
+          </a:xfrm>
+          <a:prstGeom prst="rect">
+            <a:avLst/>
+          </a:prstGeom>
+          <a:noFill/>
+        </p:spPr>
+        <p:txBody>
+          <a:bodyPr wrap="square" lIns="0" rIns="0" tIns="0" bIns="0" anchor="t">
+            <a:spAutoFit/>
+          </a:bodyPr>
+          <a:lstStyle/>
+          <a:p>
+            <a:pPr algn="ctr">
+              <a:lnSpc>
+                <a:spcPts val="899"/>
+              </a:lnSpc>
+            </a:pPr>
+            <a:r>
+              <a:rPr sz="620" b="0">
+                <a:solidFill>
+                  <a:srgbClr val="12151C"/>
+                </a:solidFill>
+                <a:latin typeface="맑은 고딕"/>
+                <a:ea typeface="맑은 고딕"/>
+              </a:rPr>
+              <a:t>INSTAGRAM  @아이디</a:t>
+            </a:r>
+          </a:p>
+        </p:txBody>
+      </p:sp>
+      <p:sp>
+        <p:nvSpPr>
+          <p:cNvPr id="20" name="텍스트"/>
+          <p:cNvSpPr txBox="1"/>
+          <p:nvPr/>
+        </p:nvSpPr>
+        <p:spPr>
+          <a:xfrm>
+            <a:off x="360000" y="1526400"/>
             <a:ext cx="2520000" cy="123826"/>
           </a:xfrm>
           <a:prstGeom prst="rect">
@@ -4040,7 +4111,7 @@
               </a:lnSpc>
             </a:pPr>
             <a:r>
-              <a:rPr sz="650" b="1" spc="300">
+              <a:rPr sz="650" b="1" spc="220">
                 <a:solidFill>
                   <a:srgbClr val="1F3B4E"/>
                 </a:solidFill>
